--- a/examples/slides/output/miku-demo.pptx
+++ b/examples/slides/output/miku-demo.pptx
@@ -2106,7 +2106,7 @@
                 <a:ea typeface="Arial" pitchFamily="34" charset="-122"/>
                 <a:cs typeface="Arial" pitchFamily="34" charset="-120"/>
               </a:rPr>
-              <a:t>StepFun / MiniMax</a:t>
+              <a:t>GPT Image 2 / Nano Banana</a:t>
             </a:r>
             <a:endParaRPr lang="en-US" sz="1100" dirty="0"/>
           </a:p>
